--- a/提案資料/WineBank_新レートカード_3枚.pptx
+++ b/提案資料/WineBank_新レートカード_3枚.pptx
@@ -504,7 +504,7 @@
           <a:p>
             <a:r>
               <a:rPr lang="en-US" dirty="0"/>
-              <a:t>発行1マイルあたりの会員価値 0.8100円（利用率90% × 交換先加重平均0.900）。顧客が「マイル − 管理料 − 6%×PS」と引き算した場合、100万は▲0.55%、500万は+0.75%、1000万は+2.00%。100万だけマイナスになるため、この引き算をさせない見せ方（＝値上がりの有無で場合分けする本スライドの構成）が必要。</a:t>
+              <a:t>発行1マイルあたりの会員価値 0.8100円（利用率90% × 交換先加重平均0.900）。顧客が「マイル − 管理料 − 6%×PS」と引き算した場合、100万は▲0.55%、500万は+0.60%、1000万は+1.70%。100万だけマイナスになるため、この引き算をさせない見せ方（＝値上がりの有無で場合分けする本スライドの構成）が必要。</a:t>
             </a:r>
             <a:endParaRPr lang="en-US" dirty="0"/>
           </a:p>
@@ -680,7 +680,7 @@
           <a:p>
             <a:r>
               <a:rPr lang="en-US" dirty="0"/>
-              <a:t>人件費・システム費・支払利息・自社在庫の保管料は本表に含めていない（別途）。プロフィットシェアは契約終了時に精算するため、初年度時点では現金化していない発生額。会員メリットは交換先ミックスを反映した実利用ベース。額面ベースなら6%上昇時 629万円。</a:t>
+              <a:t>人件費・システム費・支払利息・自社在庫の保管料は本表に含めていない（別途）。プロフィットシェアは契約終了時に精算するため、初年度時点では現金化していない発生額。会員メリットは交換先ミックスを反映した実利用ベース。額面ベースなら6%上昇時 619万円。</a:t>
             </a:r>
             <a:endParaRPr lang="en-US" dirty="0"/>
           </a:p>
@@ -2428,7 +2428,7 @@
                           <a:ea typeface="Meiryo" pitchFamily="34" charset="-122"/>
                           <a:cs typeface="Meiryo" pitchFamily="34" charset="-120"/>
                         </a:rPr>
-                        <a:t>+217,500</a:t>
+                        <a:t>+210,000</a:t>
                       </a:r>
                       <a:endParaRPr lang="en-US" sz="1100" dirty="0">
                         <a:latin typeface="Meiryo" charset="0"/>
@@ -2449,7 +2449,7 @@
                           <a:ea typeface="Meiryo" pitchFamily="34" charset="-122"/>
                           <a:cs typeface="Meiryo" pitchFamily="34" charset="-120"/>
                         </a:rPr>
-                        <a:t>(会員72.5%)</a:t>
+                        <a:t>(会員70.0%)</a:t>
                       </a:r>
                       <a:endParaRPr lang="en-US" sz="1100" dirty="0">
                         <a:latin typeface="Meiryo" charset="0"/>
@@ -2517,7 +2517,7 @@
                           <a:ea typeface="Meiryo" pitchFamily="34" charset="-122"/>
                           <a:cs typeface="Meiryo" pitchFamily="34" charset="-120"/>
                         </a:rPr>
-                        <a:t>+337,500</a:t>
+                        <a:t>+330,000</a:t>
                       </a:r>
                       <a:endParaRPr lang="en-US" sz="1200" dirty="0">
                         <a:latin typeface="Meiryo" charset="0"/>
@@ -2538,7 +2538,7 @@
                           <a:ea typeface="Meiryo" pitchFamily="34" charset="-122"/>
                           <a:cs typeface="Meiryo" pitchFamily="34" charset="-120"/>
                         </a:rPr>
-                        <a:t>+6.75%</a:t>
+                        <a:t>+6.60%</a:t>
                       </a:r>
                       <a:endParaRPr lang="en-US" sz="1200" dirty="0">
                         <a:latin typeface="Meiryo" charset="0"/>
@@ -2943,7 +2943,7 @@
                           <a:ea typeface="Meiryo" pitchFamily="34" charset="-122"/>
                           <a:cs typeface="Meiryo" pitchFamily="34" charset="-120"/>
                         </a:rPr>
-                        <a:t>+450,000</a:t>
+                        <a:t>+420,000</a:t>
                       </a:r>
                       <a:endParaRPr lang="en-US" sz="1100" dirty="0">
                         <a:latin typeface="Meiryo" charset="0"/>
@@ -2964,7 +2964,7 @@
                           <a:ea typeface="Meiryo" pitchFamily="34" charset="-122"/>
                           <a:cs typeface="Meiryo" pitchFamily="34" charset="-120"/>
                         </a:rPr>
-                        <a:t>(会員75.0%)</a:t>
+                        <a:t>(会員70.0%)</a:t>
                       </a:r>
                       <a:endParaRPr lang="en-US" sz="1100" dirty="0">
                         <a:latin typeface="Meiryo" charset="0"/>
@@ -3032,7 +3032,7 @@
                           <a:ea typeface="Meiryo" pitchFamily="34" charset="-122"/>
                           <a:cs typeface="Meiryo" pitchFamily="34" charset="-120"/>
                         </a:rPr>
-                        <a:t>+800,000</a:t>
+                        <a:t>+770,000</a:t>
                       </a:r>
                       <a:endParaRPr lang="en-US" sz="1200" dirty="0">
                         <a:latin typeface="Meiryo" charset="0"/>
@@ -3053,7 +3053,7 @@
                           <a:ea typeface="Meiryo" pitchFamily="34" charset="-122"/>
                           <a:cs typeface="Meiryo" pitchFamily="34" charset="-120"/>
                         </a:rPr>
-                        <a:t>+8.00%</a:t>
+                        <a:t>+7.70%</a:t>
                       </a:r>
                       <a:endParaRPr lang="en-US" sz="1200" dirty="0">
                         <a:latin typeface="Meiryo" charset="0"/>
@@ -7615,7 +7615,7 @@
                           <a:ea typeface="Meiryo" pitchFamily="34" charset="-122"/>
                           <a:cs typeface="Meiryo" pitchFamily="34" charset="-120"/>
                         </a:rPr>
-                        <a:t>+57,155</a:t>
+                        <a:t>+64,655</a:t>
                       </a:r>
                       <a:endParaRPr lang="en-US" sz="1050" dirty="0">
                         <a:latin typeface="Meiryo" charset="0"/>
@@ -7957,7 +7957,7 @@
                           <a:ea typeface="Meiryo" pitchFamily="34" charset="-122"/>
                           <a:cs typeface="Meiryo" pitchFamily="34" charset="-120"/>
                         </a:rPr>
-                        <a:t>+38,172</a:t>
+                        <a:t>+68,172</a:t>
                       </a:r>
                       <a:endParaRPr lang="en-US" sz="1050" dirty="0">
                         <a:latin typeface="Meiryo" charset="0"/>
@@ -8470,7 +8470,7 @@
                 <a:ea typeface="Meiryo" pitchFamily="34" charset="-122"/>
                 <a:cs typeface="Meiryo" pitchFamily="34" charset="-120"/>
               </a:rPr>
-              <a:t>144</a:t>
+              <a:t>153</a:t>
             </a:r>
             <a:endParaRPr lang="en-US" sz="1400" dirty="0"/>
           </a:p>
@@ -8585,7 +8585,7 @@
                 <a:ea typeface="Meiryo" pitchFamily="34" charset="-122"/>
                 <a:cs typeface="Meiryo" pitchFamily="34" charset="-120"/>
               </a:rPr>
-              <a:t>管理料は2.50〜2.75%とほぼ一定なのに、マイル還元は4%→6%へ上がるためです。1000万は現金で年111,828円の持ち出しとなり、プロフィットシェア150,000円で回収する設計です。</a:t>
+              <a:t>管理料は2.50〜2.75%とほぼ一定なのに、マイル還元は4%→6%へ上がるためです。1000万は現金で年111,828円の持ち出しとなり、プロフィットシェア180,000円で回収する設計です。</a:t>
             </a:r>
             <a:endParaRPr lang="en-US" sz="1050" dirty="0"/>
           </a:p>
@@ -10333,7 +10333,7 @@
                           <a:ea typeface="Meiryo" pitchFamily="34" charset="-122"/>
                           <a:cs typeface="Meiryo" pitchFamily="34" charset="-120"/>
                         </a:rPr>
-                        <a:t>170</a:t>
+                        <a:t>180</a:t>
                       </a:r>
                       <a:endParaRPr lang="en-US" sz="1100" dirty="0">
                         <a:latin typeface="Meiryo" charset="0"/>
@@ -10471,7 +10471,7 @@
                           <a:ea typeface="Meiryo" pitchFamily="34" charset="-122"/>
                           <a:cs typeface="Meiryo" pitchFamily="34" charset="-120"/>
                         </a:rPr>
-                        <a:t>3,144</a:t>
+                        <a:t>3,153</a:t>
                       </a:r>
                       <a:endParaRPr lang="en-US" sz="1250" dirty="0">
                         <a:latin typeface="Meiryo" charset="0"/>
@@ -10984,7 +10984,7 @@
                 <a:ea typeface="Meiryo" pitchFamily="34" charset="-122"/>
                 <a:cs typeface="Meiryo" pitchFamily="34" charset="-120"/>
               </a:rPr>
-              <a:t>＋ PS 170 万円</a:t>
+              <a:t>＋ PS 180 万円</a:t>
             </a:r>
             <a:endParaRPr lang="en-US" sz="1150" dirty="0"/>
           </a:p>
@@ -11023,7 +11023,7 @@
                 <a:ea typeface="Meiryo" pitchFamily="34" charset="-122"/>
                 <a:cs typeface="Meiryo" pitchFamily="34" charset="-120"/>
               </a:rPr>
-              <a:t>経済 144 万円</a:t>
+              <a:t>経済 153 万円</a:t>
             </a:r>
             <a:endParaRPr lang="en-US" sz="1400" dirty="0"/>
           </a:p>
@@ -11174,7 +11174,7 @@
                 <a:ea typeface="Meiryo" pitchFamily="34" charset="-122"/>
                 <a:cs typeface="Meiryo" pitchFamily="34" charset="-120"/>
               </a:rPr>
-              <a:t>540 万円</a:t>
+              <a:t>530 万円</a:t>
             </a:r>
             <a:endParaRPr lang="en-US" sz="1700" dirty="0"/>
           </a:p>
@@ -11325,7 +11325,7 @@
                 <a:ea typeface="Meiryo" pitchFamily="34" charset="-122"/>
                 <a:cs typeface="Meiryo" pitchFamily="34" charset="-120"/>
               </a:rPr>
-              <a:t>会員は年110〜540万円、当社は初年度3,144万円。両方が取れています。</a:t>
+              <a:t>会員は年110〜530万円、当社は初年度3,153万円。両方が取れています。</a:t>
             </a:r>
             <a:endParaRPr lang="en-US" sz="1700" dirty="0"/>
           </a:p>

--- a/提案資料/WineBank_新レートカード_3枚.pptx
+++ b/提案資料/WineBank_新レートカード_3枚.pptx
@@ -504,7 +504,7 @@
           <a:p>
             <a:r>
               <a:rPr lang="en-US" dirty="0"/>
-              <a:t>発行1マイルあたりの会員価値 0.8100円（利用率90% × 交換先加重平均0.900）。顧客が「マイル − 管理料 − 6%×PS」と引き算した場合、100万は▲0.55%、500万は+0.60%、1000万は+1.70%。100万だけマイナスになるため、この引き算をさせない見せ方（＝値上がりの有無で場合分けする本スライドの構成）が必要。</a:t>
+              <a:t>発行1マイルあたりの会員価値 0.8100円（利用率90% × 交換先加重平均0.900）。顧客が「マイル − 管理料 − 6%×PS」と引き算した場合、100万は▲0.55%、500万は+0.45%、1000万は+1.45%。100万だけマイナスになるため、この引き算をさせない見せ方（＝値上がりの有無で場合分けする本スライドの構成）が必要。</a:t>
             </a:r>
             <a:endParaRPr lang="en-US" dirty="0"/>
           </a:p>
@@ -592,7 +592,7 @@
           <a:p>
             <a:r>
               <a:rPr lang="en-US" dirty="0"/>
-              <a:t>1000万ティアの現金がゼロになる発行1マイル原価は 0.325円（現状 0.511円）。原価率の根拠：グループ直営飲食90%、ワインスクール80%、会員交流イベント・ワイナート年間購読50%、ワイン追加購入80%、WineBank CLUB年会費充当10%、オークション参加30%。グランメゾンは交換レート0.5円×原価率90%。利用時の加重平均0.568円に利用率90%を掛けて発行1マイル原価0.511円。現金収支には保管・保険▲1.05%とオークション手数料+0.5%を織り込み済み。</a:t>
+              <a:t>1000万ティアの現金がゼロになる発行1マイル原価は 0.367円（現状 0.511円）。原価率の根拠：グループ直営飲食90%、ワインスクール80%、会員交流イベント・ワイナート年間購読50%、ワイン追加購入80%、WineBank CLUB年会費充当10%、オークション参加30%。グランメゾンは交換レート0.5円×原価率90%。利用時の加重平均0.568円に利用率90%を掛けて発行1マイル原価0.511円。現金収支には保管・保険▲1.05%とオークション手数料+0.5%を織り込み済み。</a:t>
             </a:r>
             <a:endParaRPr lang="en-US" dirty="0"/>
           </a:p>
@@ -680,7 +680,7 @@
           <a:p>
             <a:r>
               <a:rPr lang="en-US" dirty="0"/>
-              <a:t>人件費・システム費・支払利息・自社在庫の保管料は本表に含めていない（別途）。プロフィットシェアは契約終了時に精算するため、初年度時点では現金化していない発生額。会員メリットは交換先ミックスを反映した実利用ベース。額面ベースなら6%上昇時 619万円。</a:t>
+              <a:t>人件費・システム費・支払利息・自社在庫の保管料は本表に含めていない（別途）。プロフィットシェアは契約終了時に精算するため、初年度時点では現金化していない発生額。会員メリットは交換先ミックスを反映した実利用ベース。額面ベースなら6%上昇時 610万円。</a:t>
             </a:r>
             <a:endParaRPr lang="en-US" dirty="0"/>
           </a:p>
@@ -2250,7 +2250,7 @@
                           <a:ea typeface="Meiryo" pitchFamily="34" charset="-122"/>
                           <a:cs typeface="Meiryo" pitchFamily="34" charset="-120"/>
                         </a:rPr>
-                        <a:t>▲130,000</a:t>
+                        <a:t>▲137,500</a:t>
                       </a:r>
                       <a:endParaRPr lang="en-US" sz="1100" dirty="0">
                         <a:latin typeface="Meiryo" charset="0"/>
@@ -2271,7 +2271,7 @@
                           <a:ea typeface="Meiryo" pitchFamily="34" charset="-122"/>
                           <a:cs typeface="Meiryo" pitchFamily="34" charset="-120"/>
                         </a:rPr>
-                        <a:t>(2.60%)</a:t>
+                        <a:t>(2.75%)</a:t>
                       </a:r>
                       <a:endParaRPr lang="en-US" sz="1100" dirty="0">
                         <a:latin typeface="Meiryo" charset="0"/>
@@ -2517,7 +2517,7 @@
                           <a:ea typeface="Meiryo" pitchFamily="34" charset="-122"/>
                           <a:cs typeface="Meiryo" pitchFamily="34" charset="-120"/>
                         </a:rPr>
-                        <a:t>+330,000</a:t>
+                        <a:t>+322,500</a:t>
                       </a:r>
                       <a:endParaRPr lang="en-US" sz="1200" dirty="0">
                         <a:latin typeface="Meiryo" charset="0"/>
@@ -2538,7 +2538,7 @@
                           <a:ea typeface="Meiryo" pitchFamily="34" charset="-122"/>
                           <a:cs typeface="Meiryo" pitchFamily="34" charset="-120"/>
                         </a:rPr>
-                        <a:t>+6.60%</a:t>
+                        <a:t>+6.45%</a:t>
                       </a:r>
                       <a:endParaRPr lang="en-US" sz="1200" dirty="0">
                         <a:latin typeface="Meiryo" charset="0"/>
@@ -2606,7 +2606,7 @@
                           <a:ea typeface="Meiryo" pitchFamily="34" charset="-122"/>
                           <a:cs typeface="Meiryo" pitchFamily="34" charset="-120"/>
                         </a:rPr>
-                        <a:t>+120,000</a:t>
+                        <a:t>+112,500</a:t>
                       </a:r>
                       <a:endParaRPr lang="en-US" sz="1200" dirty="0">
                         <a:latin typeface="Meiryo" charset="0"/>
@@ -2627,7 +2627,7 @@
                           <a:ea typeface="Meiryo" pitchFamily="34" charset="-122"/>
                           <a:cs typeface="Meiryo" pitchFamily="34" charset="-120"/>
                         </a:rPr>
-                        <a:t>+2.40%</a:t>
+                        <a:t>+2.25%</a:t>
                       </a:r>
                       <a:endParaRPr lang="en-US" sz="1200" dirty="0">
                         <a:latin typeface="Meiryo" charset="0"/>
@@ -2765,7 +2765,7 @@
                           <a:ea typeface="Meiryo" pitchFamily="34" charset="-122"/>
                           <a:cs typeface="Meiryo" pitchFamily="34" charset="-120"/>
                         </a:rPr>
-                        <a:t>▲250,000</a:t>
+                        <a:t>▲275,000</a:t>
                       </a:r>
                       <a:endParaRPr lang="en-US" sz="1100" dirty="0">
                         <a:latin typeface="Meiryo" charset="0"/>
@@ -2786,7 +2786,7 @@
                           <a:ea typeface="Meiryo" pitchFamily="34" charset="-122"/>
                           <a:cs typeface="Meiryo" pitchFamily="34" charset="-120"/>
                         </a:rPr>
-                        <a:t>(2.50%)</a:t>
+                        <a:t>(2.75%)</a:t>
                       </a:r>
                       <a:endParaRPr lang="en-US" sz="1100" dirty="0">
                         <a:latin typeface="Meiryo" charset="0"/>
@@ -3032,7 +3032,7 @@
                           <a:ea typeface="Meiryo" pitchFamily="34" charset="-122"/>
                           <a:cs typeface="Meiryo" pitchFamily="34" charset="-120"/>
                         </a:rPr>
-                        <a:t>+770,000</a:t>
+                        <a:t>+745,000</a:t>
                       </a:r>
                       <a:endParaRPr lang="en-US" sz="1200" dirty="0">
                         <a:latin typeface="Meiryo" charset="0"/>
@@ -3053,7 +3053,7 @@
                           <a:ea typeface="Meiryo" pitchFamily="34" charset="-122"/>
                           <a:cs typeface="Meiryo" pitchFamily="34" charset="-120"/>
                         </a:rPr>
-                        <a:t>+7.70%</a:t>
+                        <a:t>+7.45%</a:t>
                       </a:r>
                       <a:endParaRPr lang="en-US" sz="1200" dirty="0">
                         <a:latin typeface="Meiryo" charset="0"/>
@@ -3121,7 +3121,7 @@
                           <a:ea typeface="Meiryo" pitchFamily="34" charset="-122"/>
                           <a:cs typeface="Meiryo" pitchFamily="34" charset="-120"/>
                         </a:rPr>
-                        <a:t>+350,000</a:t>
+                        <a:t>+325,000</a:t>
                       </a:r>
                       <a:endParaRPr lang="en-US" sz="1200" dirty="0">
                         <a:latin typeface="Meiryo" charset="0"/>
@@ -3142,7 +3142,7 @@
                           <a:ea typeface="Meiryo" pitchFamily="34" charset="-122"/>
                           <a:cs typeface="Meiryo" pitchFamily="34" charset="-120"/>
                         </a:rPr>
-                        <a:t>+3.50%</a:t>
+                        <a:t>+3.25%</a:t>
                       </a:r>
                       <a:endParaRPr lang="en-US" sz="1200" dirty="0">
                         <a:latin typeface="Meiryo" charset="0"/>
@@ -3307,7 +3307,7 @@
                 <a:ea typeface="Meiryo" pitchFamily="34" charset="-122"/>
                 <a:cs typeface="Meiryo" pitchFamily="34" charset="-120"/>
               </a:rPr>
-              <a:t>値上がり益の70〜75%は会員のものです。100万円なら年42,000円。マイル40,000円と合わせ、管理料27,500円を引いても年54,500円のプラス。</a:t>
+              <a:t>値上がり益の70%は会員のものです。100万円なら年42,000円。マイル40,000円と合わせ、管理料27,500円を引いても年54,500円のプラス。</a:t>
             </a:r>
             <a:endParaRPr lang="en-US" sz="1150" dirty="0"/>
           </a:p>
@@ -7411,7 +7411,7 @@
                           <a:ea typeface="Meiryo" pitchFamily="34" charset="-122"/>
                           <a:cs typeface="Meiryo" pitchFamily="34" charset="-120"/>
                         </a:rPr>
-                        <a:t>130,000</a:t>
+                        <a:t>137,500</a:t>
                       </a:r>
                       <a:endParaRPr lang="en-US" sz="1050" dirty="0">
                         <a:latin typeface="Meiryo" charset="0"/>
@@ -7547,7 +7547,7 @@
                           <a:ea typeface="Meiryo" pitchFamily="34" charset="-122"/>
                           <a:cs typeface="Meiryo" pitchFamily="34" charset="-120"/>
                         </a:rPr>
-                        <a:t>▲25,345</a:t>
+                        <a:t>▲17,845</a:t>
                       </a:r>
                       <a:endParaRPr lang="en-US" sz="1050" dirty="0">
                         <a:latin typeface="Meiryo" charset="0"/>
@@ -7615,7 +7615,7 @@
                           <a:ea typeface="Meiryo" pitchFamily="34" charset="-122"/>
                           <a:cs typeface="Meiryo" pitchFamily="34" charset="-120"/>
                         </a:rPr>
-                        <a:t>+64,655</a:t>
+                        <a:t>+72,155</a:t>
                       </a:r>
                       <a:endParaRPr lang="en-US" sz="1050" dirty="0">
                         <a:latin typeface="Meiryo" charset="0"/>
@@ -7753,7 +7753,7 @@
                           <a:ea typeface="Meiryo" pitchFamily="34" charset="-122"/>
                           <a:cs typeface="Meiryo" pitchFamily="34" charset="-120"/>
                         </a:rPr>
-                        <a:t>250,000</a:t>
+                        <a:t>275,000</a:t>
                       </a:r>
                       <a:endParaRPr lang="en-US" sz="1050" dirty="0">
                         <a:latin typeface="Meiryo" charset="0"/>
@@ -7889,7 +7889,7 @@
                           <a:ea typeface="Meiryo" pitchFamily="34" charset="-122"/>
                           <a:cs typeface="Meiryo" pitchFamily="34" charset="-120"/>
                         </a:rPr>
-                        <a:t>▲111,828</a:t>
+                        <a:t>▲86,828</a:t>
                       </a:r>
                       <a:endParaRPr lang="en-US" sz="1050" dirty="0">
                         <a:latin typeface="Meiryo" charset="0"/>
@@ -7957,7 +7957,7 @@
                           <a:ea typeface="Meiryo" pitchFamily="34" charset="-122"/>
                           <a:cs typeface="Meiryo" pitchFamily="34" charset="-120"/>
                         </a:rPr>
-                        <a:t>+68,172</a:t>
+                        <a:t>+93,172</a:t>
                       </a:r>
                       <a:endParaRPr lang="en-US" sz="1050" dirty="0">
                         <a:latin typeface="Meiryo" charset="0"/>
@@ -8158,7 +8158,7 @@
                 <a:ea typeface="Meiryo" pitchFamily="34" charset="-122"/>
                 <a:cs typeface="Meiryo" pitchFamily="34" charset="-120"/>
               </a:rPr>
-              <a:t>266</a:t>
+              <a:t>275</a:t>
             </a:r>
             <a:endParaRPr lang="en-US" sz="1400" dirty="0"/>
           </a:p>
@@ -8470,7 +8470,7 @@
                 <a:ea typeface="Meiryo" pitchFamily="34" charset="-122"/>
                 <a:cs typeface="Meiryo" pitchFamily="34" charset="-120"/>
               </a:rPr>
-              <a:t>153</a:t>
+              <a:t>162</a:t>
             </a:r>
             <a:endParaRPr lang="en-US" sz="1400" dirty="0"/>
           </a:p>
@@ -8585,7 +8585,7 @@
                 <a:ea typeface="Meiryo" pitchFamily="34" charset="-122"/>
                 <a:cs typeface="Meiryo" pitchFamily="34" charset="-120"/>
               </a:rPr>
-              <a:t>管理料は2.50〜2.75%とほぼ一定なのに、マイル還元は4%→6%へ上がるためです。1000万は現金で年111,828円の持ち出しとなり、プロフィットシェア180,000円で回収する設計です。</a:t>
+              <a:t>管理料は全ランク2.75%で一定なのに、マイル還元は4%→6%へ上がるためです。1000万は現金で年86,828円の持ち出しとなり、プロフィットシェア180,000円で回収する設計です。</a:t>
             </a:r>
             <a:endParaRPr lang="en-US" sz="1050" dirty="0"/>
           </a:p>
@@ -9229,7 +9229,7 @@
                           <a:ea typeface="Meiryo" pitchFamily="34" charset="-122"/>
                           <a:cs typeface="Meiryo" pitchFamily="34" charset="-120"/>
                         </a:rPr>
-                        <a:t>266</a:t>
+                        <a:t>275</a:t>
                       </a:r>
                       <a:endParaRPr lang="en-US" sz="1100" dirty="0">
                         <a:latin typeface="Meiryo" charset="0"/>
@@ -9505,7 +9505,7 @@
                           <a:ea typeface="Meiryo" pitchFamily="34" charset="-122"/>
                           <a:cs typeface="Meiryo" pitchFamily="34" charset="-120"/>
                         </a:rPr>
-                        <a:t>10,316</a:t>
+                        <a:t>10,325</a:t>
                       </a:r>
                       <a:endParaRPr lang="en-US" sz="1100" dirty="0">
                         <a:latin typeface="Meiryo" charset="0"/>
@@ -9781,7 +9781,7 @@
                           <a:ea typeface="Meiryo" pitchFamily="34" charset="-122"/>
                           <a:cs typeface="Meiryo" pitchFamily="34" charset="-120"/>
                         </a:rPr>
-                        <a:t>3,316</a:t>
+                        <a:t>3,325</a:t>
                       </a:r>
                       <a:endParaRPr lang="en-US" sz="1100" dirty="0">
                         <a:latin typeface="Meiryo" charset="0"/>
@@ -10195,7 +10195,7 @@
                           <a:ea typeface="Meiryo" pitchFamily="34" charset="-122"/>
                           <a:cs typeface="Meiryo" pitchFamily="34" charset="-120"/>
                         </a:rPr>
-                        <a:t>2,973</a:t>
+                        <a:t>2,982</a:t>
                       </a:r>
                       <a:endParaRPr lang="en-US" sz="1250" dirty="0">
                         <a:latin typeface="Meiryo" charset="0"/>
@@ -10471,7 +10471,7 @@
                           <a:ea typeface="Meiryo" pitchFamily="34" charset="-122"/>
                           <a:cs typeface="Meiryo" pitchFamily="34" charset="-120"/>
                         </a:rPr>
-                        <a:t>3,153</a:t>
+                        <a:t>3,162</a:t>
                       </a:r>
                       <a:endParaRPr lang="en-US" sz="1250" dirty="0">
                         <a:latin typeface="Meiryo" charset="0"/>
@@ -10672,7 +10672,7 @@
                 <a:ea typeface="Meiryo" pitchFamily="34" charset="-122"/>
                 <a:cs typeface="Meiryo" pitchFamily="34" charset="-120"/>
               </a:rPr>
-              <a:t>266</a:t>
+              <a:t>275</a:t>
             </a:r>
             <a:endParaRPr lang="en-US" sz="1100" dirty="0"/>
           </a:p>
@@ -10945,7 +10945,7 @@
                 <a:ea typeface="Meiryo" pitchFamily="34" charset="-122"/>
                 <a:cs typeface="Meiryo" pitchFamily="34" charset="-120"/>
               </a:rPr>
-              <a:t>現金 ▲27 万円</a:t>
+              <a:t>現金 ▲18 万円</a:t>
             </a:r>
             <a:endParaRPr lang="en-US" sz="1400" dirty="0"/>
           </a:p>
@@ -11023,7 +11023,7 @@
                 <a:ea typeface="Meiryo" pitchFamily="34" charset="-122"/>
                 <a:cs typeface="Meiryo" pitchFamily="34" charset="-120"/>
               </a:rPr>
-              <a:t>経済 153 万円</a:t>
+              <a:t>経済 162 万円</a:t>
             </a:r>
             <a:endParaRPr lang="en-US" sz="1400" dirty="0"/>
           </a:p>
@@ -11174,7 +11174,7 @@
                 <a:ea typeface="Meiryo" pitchFamily="34" charset="-122"/>
                 <a:cs typeface="Meiryo" pitchFamily="34" charset="-120"/>
               </a:rPr>
-              <a:t>530 万円</a:t>
+              <a:t>522 万円</a:t>
             </a:r>
             <a:endParaRPr lang="en-US" sz="1700" dirty="0"/>
           </a:p>
@@ -11252,7 +11252,7 @@
                 <a:ea typeface="Meiryo" pitchFamily="34" charset="-122"/>
                 <a:cs typeface="Meiryo" pitchFamily="34" charset="-120"/>
               </a:rPr>
-              <a:t>110 万円</a:t>
+              <a:t>102 万円</a:t>
             </a:r>
             <a:endParaRPr lang="en-US" sz="1700" dirty="0"/>
           </a:p>
@@ -11325,7 +11325,7 @@
                 <a:ea typeface="Meiryo" pitchFamily="34" charset="-122"/>
                 <a:cs typeface="Meiryo" pitchFamily="34" charset="-120"/>
               </a:rPr>
-              <a:t>会員は年110〜530万円、当社は初年度3,153万円。両方が取れています。</a:t>
+              <a:t>会員は年102〜522万円、当社は初年度3,162万円。両方が取れています。</a:t>
             </a:r>
             <a:endParaRPr lang="en-US" sz="1700" dirty="0"/>
           </a:p>
@@ -11364,7 +11364,7 @@
                 <a:ea typeface="Meiryo" pitchFamily="34" charset="-122"/>
                 <a:cs typeface="Meiryo" pitchFamily="34" charset="-120"/>
               </a:rPr>
-              <a:t>ただし2年目以降の現金は▲27万円。利益はワイン販売の粗利とプロフィットシェアに乗っています。</a:t>
+              <a:t>ただし2年目以降の現金は▲18万円。利益はワイン販売の粗利とプロフィットシェアに乗っています。</a:t>
             </a:r>
             <a:endParaRPr lang="en-US" sz="1150" dirty="0"/>
           </a:p>
